--- a/LTV-analyzer.pptx
+++ b/LTV-analyzer.pptx
@@ -9245,7 +9245,7 @@
                 </a:solidFill>
                 <a:latin typeface="+mn-lt"/>
               </a:rPr>
-              <a:t>Copyright © LTV-analyzer All rights reserved.</a:t>
+              <a:t>© 2026 Gambit, Inc. All rights reserved.</a:t>
             </a:r>
           </a:p>
         </p:txBody>
